--- a/1. occupancy and N-mixture/Occupancy lecture.pptx
+++ b/1. occupancy and N-mixture/Occupancy lecture.pptx
@@ -152,6 +152,67 @@
 </p:presentation>
 </file>
 
+<file path=ppt/revisionInfo.xml><?xml version="1.0" encoding="utf-8"?>
+<p1510:revInfo xmlns:a="http://schemas.openxmlformats.org/drawingml/2006/main" xmlns:r="http://schemas.openxmlformats.org/officeDocument/2006/relationships" xmlns:p1510="http://schemas.microsoft.com/office/powerpoint/2015/10/main">
+  <p1510:revLst>
+    <p1510:client id="{B2BF5383-F145-4BA3-A8A9-C7A83BB06F71}" v="4" dt="2024-04-04T02:25:38.797"/>
+  </p1510:revLst>
+</p1510:revInfo>
+</file>
+
+<file path=ppt/changesInfos/changesInfo1.xml><?xml version="1.0" encoding="utf-8"?>
+<pc:chgInfo xmlns:a="http://schemas.openxmlformats.org/drawingml/2006/main" xmlns:r="http://schemas.openxmlformats.org/officeDocument/2006/relationships" xmlns:ac="http://schemas.microsoft.com/office/drawing/2013/main/command" xmlns:pc="http://schemas.microsoft.com/office/powerpoint/2013/main/command">
+  <pc:docChgLst>
+    <pc:chgData name="Viorel Popescu" userId="9f284cf50f70590d" providerId="LiveId" clId="{B2BF5383-F145-4BA3-A8A9-C7A83BB06F71}"/>
+    <pc:docChg chg="undo custSel modSld">
+      <pc:chgData name="Viorel Popescu" userId="9f284cf50f70590d" providerId="LiveId" clId="{B2BF5383-F145-4BA3-A8A9-C7A83BB06F71}" dt="2024-04-04T02:25:53.631" v="7" actId="1076"/>
+      <pc:docMkLst>
+        <pc:docMk/>
+      </pc:docMkLst>
+      <pc:sldChg chg="addSp delSp modSp mod">
+        <pc:chgData name="Viorel Popescu" userId="9f284cf50f70590d" providerId="LiveId" clId="{B2BF5383-F145-4BA3-A8A9-C7A83BB06F71}" dt="2024-04-04T02:25:53.631" v="7" actId="1076"/>
+        <pc:sldMkLst>
+          <pc:docMk/>
+          <pc:sldMk cId="1669756437" sldId="295"/>
+        </pc:sldMkLst>
+        <pc:spChg chg="mod ord">
+          <ac:chgData name="Viorel Popescu" userId="9f284cf50f70590d" providerId="LiveId" clId="{B2BF5383-F145-4BA3-A8A9-C7A83BB06F71}" dt="2024-04-04T02:25:53.631" v="7" actId="1076"/>
+          <ac:spMkLst>
+            <pc:docMk/>
+            <pc:sldMk cId="1669756437" sldId="295"/>
+            <ac:spMk id="2" creationId="{00000000-0000-0000-0000-000000000000}"/>
+          </ac:spMkLst>
+        </pc:spChg>
+        <pc:picChg chg="add mod ord">
+          <ac:chgData name="Viorel Popescu" userId="9f284cf50f70590d" providerId="LiveId" clId="{B2BF5383-F145-4BA3-A8A9-C7A83BB06F71}" dt="2024-04-04T02:25:30.001" v="3" actId="167"/>
+          <ac:picMkLst>
+            <pc:docMk/>
+            <pc:sldMk cId="1669756437" sldId="295"/>
+            <ac:picMk id="3" creationId="{0E78957C-20E2-EF1B-A76C-E843279E600A}"/>
+          </ac:picMkLst>
+        </pc:picChg>
+        <pc:picChg chg="add mod">
+          <ac:chgData name="Viorel Popescu" userId="9f284cf50f70590d" providerId="LiveId" clId="{B2BF5383-F145-4BA3-A8A9-C7A83BB06F71}" dt="2024-04-04T02:25:38.797" v="5"/>
+          <ac:picMkLst>
+            <pc:docMk/>
+            <pc:sldMk cId="1669756437" sldId="295"/>
+            <ac:picMk id="4" creationId="{5CDF5F0F-0A57-CE2B-43E3-AC2405DD2AF6}"/>
+          </ac:picMkLst>
+        </pc:picChg>
+        <pc:picChg chg="del">
+          <ac:chgData name="Viorel Popescu" userId="9f284cf50f70590d" providerId="LiveId" clId="{B2BF5383-F145-4BA3-A8A9-C7A83BB06F71}" dt="2024-04-04T02:25:18.811" v="0" actId="478"/>
+          <ac:picMkLst>
+            <pc:docMk/>
+            <pc:sldMk cId="1669756437" sldId="295"/>
+            <ac:picMk id="1026" creationId="{69FA9C59-D2DE-4CAF-A1CE-6801CF4A9225}"/>
+          </ac:picMkLst>
+        </pc:picChg>
+      </pc:sldChg>
+    </pc:docChg>
+  </pc:docChgLst>
+</pc:chgInfo>
+</file>
+
 <file path=ppt/notesMasters/notesMaster1.xml><?xml version="1.0" encoding="utf-8"?>
 <p:notesMaster xmlns:a="http://schemas.openxmlformats.org/drawingml/2006/main" xmlns:r="http://schemas.openxmlformats.org/officeDocument/2006/relationships" xmlns:p="http://schemas.openxmlformats.org/presentationml/2006/main">
   <p:cSld>
@@ -234,7 +295,7 @@
           <a:p>
             <a:fld id="{B6D33491-9FF5-4012-B0D6-146D6CA8F78C}" type="datetimeFigureOut">
               <a:rPr lang="en-US" smtClean="0"/>
-              <a:t>10/24/2023</a:t>
+              <a:t>4/4/2024</a:t>
             </a:fld>
             <a:endParaRPr lang="en-US"/>
           </a:p>
@@ -1854,7 +1915,7 @@
           <a:p>
             <a:fld id="{E01DD742-0691-45B7-82EB-99995F92A184}" type="datetimeFigureOut">
               <a:rPr lang="en-US" smtClean="0"/>
-              <a:t>10/24/2023</a:t>
+              <a:t>4/4/2024</a:t>
             </a:fld>
             <a:endParaRPr lang="en-US"/>
           </a:p>
@@ -2022,7 +2083,7 @@
           <a:p>
             <a:fld id="{E01DD742-0691-45B7-82EB-99995F92A184}" type="datetimeFigureOut">
               <a:rPr lang="en-US" smtClean="0"/>
-              <a:t>10/24/2023</a:t>
+              <a:t>4/4/2024</a:t>
             </a:fld>
             <a:endParaRPr lang="en-US"/>
           </a:p>
@@ -2200,7 +2261,7 @@
           <a:p>
             <a:fld id="{E01DD742-0691-45B7-82EB-99995F92A184}" type="datetimeFigureOut">
               <a:rPr lang="en-US" smtClean="0"/>
-              <a:t>10/24/2023</a:t>
+              <a:t>4/4/2024</a:t>
             </a:fld>
             <a:endParaRPr lang="en-US"/>
           </a:p>
@@ -2368,7 +2429,7 @@
           <a:p>
             <a:fld id="{E01DD742-0691-45B7-82EB-99995F92A184}" type="datetimeFigureOut">
               <a:rPr lang="en-US" smtClean="0"/>
-              <a:t>10/24/2023</a:t>
+              <a:t>4/4/2024</a:t>
             </a:fld>
             <a:endParaRPr lang="en-US"/>
           </a:p>
@@ -2613,7 +2674,7 @@
           <a:p>
             <a:fld id="{E01DD742-0691-45B7-82EB-99995F92A184}" type="datetimeFigureOut">
               <a:rPr lang="en-US" smtClean="0"/>
-              <a:t>10/24/2023</a:t>
+              <a:t>4/4/2024</a:t>
             </a:fld>
             <a:endParaRPr lang="en-US"/>
           </a:p>
@@ -2842,7 +2903,7 @@
           <a:p>
             <a:fld id="{E01DD742-0691-45B7-82EB-99995F92A184}" type="datetimeFigureOut">
               <a:rPr lang="en-US" smtClean="0"/>
-              <a:t>10/24/2023</a:t>
+              <a:t>4/4/2024</a:t>
             </a:fld>
             <a:endParaRPr lang="en-US"/>
           </a:p>
@@ -3206,7 +3267,7 @@
           <a:p>
             <a:fld id="{E01DD742-0691-45B7-82EB-99995F92A184}" type="datetimeFigureOut">
               <a:rPr lang="en-US" smtClean="0"/>
-              <a:t>10/24/2023</a:t>
+              <a:t>4/4/2024</a:t>
             </a:fld>
             <a:endParaRPr lang="en-US"/>
           </a:p>
@@ -3323,7 +3384,7 @@
           <a:p>
             <a:fld id="{E01DD742-0691-45B7-82EB-99995F92A184}" type="datetimeFigureOut">
               <a:rPr lang="en-US" smtClean="0"/>
-              <a:t>10/24/2023</a:t>
+              <a:t>4/4/2024</a:t>
             </a:fld>
             <a:endParaRPr lang="en-US"/>
           </a:p>
@@ -3418,7 +3479,7 @@
           <a:p>
             <a:fld id="{E01DD742-0691-45B7-82EB-99995F92A184}" type="datetimeFigureOut">
               <a:rPr lang="en-US" smtClean="0"/>
-              <a:t>10/24/2023</a:t>
+              <a:t>4/4/2024</a:t>
             </a:fld>
             <a:endParaRPr lang="en-US"/>
           </a:p>
@@ -3693,7 +3754,7 @@
           <a:p>
             <a:fld id="{E01DD742-0691-45B7-82EB-99995F92A184}" type="datetimeFigureOut">
               <a:rPr lang="en-US" smtClean="0"/>
-              <a:t>10/24/2023</a:t>
+              <a:t>4/4/2024</a:t>
             </a:fld>
             <a:endParaRPr lang="en-US"/>
           </a:p>
@@ -3945,7 +4006,7 @@
           <a:p>
             <a:fld id="{E01DD742-0691-45B7-82EB-99995F92A184}" type="datetimeFigureOut">
               <a:rPr lang="en-US" smtClean="0"/>
-              <a:t>10/24/2023</a:t>
+              <a:t>4/4/2024</a:t>
             </a:fld>
             <a:endParaRPr lang="en-US"/>
           </a:p>
@@ -4156,7 +4217,7 @@
           <a:p>
             <a:fld id="{E01DD742-0691-45B7-82EB-99995F92A184}" type="datetimeFigureOut">
               <a:rPr lang="en-US" smtClean="0"/>
-              <a:t>10/24/2023</a:t>
+              <a:t>4/4/2024</a:t>
             </a:fld>
             <a:endParaRPr lang="en-US"/>
           </a:p>
@@ -4634,48 +4695,38 @@
       </p:sp>
       <p:pic>
         <p:nvPicPr>
-          <p:cNvPr id="1026" name="Picture 2" descr="Image result for halloween owl flight&quot;">
+          <p:cNvPr id="4" name="Picture 3" descr="A wolf howling at the night&#10;&#10;Description automatically generated">
             <a:extLst>
               <a:ext uri="{FF2B5EF4-FFF2-40B4-BE49-F238E27FC236}">
-                <a16:creationId xmlns:a16="http://schemas.microsoft.com/office/drawing/2014/main" id="{69FA9C59-D2DE-4CAF-A1CE-6801CF4A9225}"/>
+                <a16:creationId xmlns:a16="http://schemas.microsoft.com/office/drawing/2014/main" id="{5CDF5F0F-0A57-CE2B-43E3-AC2405DD2AF6}"/>
               </a:ext>
             </a:extLst>
           </p:cNvPr>
           <p:cNvPicPr>
-            <a:picLocks noChangeAspect="1" noChangeArrowheads="1"/>
+            <a:picLocks noChangeAspect="1"/>
           </p:cNvPicPr>
           <p:nvPr/>
         </p:nvPicPr>
-        <p:blipFill rotWithShape="1">
-          <a:blip r:embed="rId2">
-            <a:alphaModFix amt="50000"/>
+        <p:blipFill>
+          <a:blip r:embed="rId2" cstate="print">
             <a:extLst>
               <a:ext uri="{28A0092B-C50C-407E-A947-70E740481C1C}">
                 <a14:useLocalDpi xmlns:a14="http://schemas.microsoft.com/office/drawing/2010/main" val="0"/>
               </a:ext>
             </a:extLst>
           </a:blip>
-          <a:srcRect b="1316"/>
-          <a:stretch/>
+          <a:stretch>
+            <a:fillRect/>
+          </a:stretch>
         </p:blipFill>
-        <p:spPr bwMode="auto">
+        <p:spPr>
           <a:xfrm>
-            <a:off x="20" y="1"/>
-            <a:ext cx="9143980" cy="6857999"/>
+            <a:off x="0" y="-1"/>
+            <a:ext cx="9144000" cy="6858000"/>
           </a:xfrm>
           <a:prstGeom prst="rect">
             <a:avLst/>
           </a:prstGeom>
-          <a:noFill/>
-          <a:extLst>
-            <a:ext uri="{909E8E84-426E-40DD-AFC4-6F175D3DCCD1}">
-              <a14:hiddenFill xmlns:a14="http://schemas.microsoft.com/office/drawing/2010/main">
-                <a:solidFill>
-                  <a:srgbClr val="FFFFFF"/>
-                </a:solidFill>
-              </a14:hiddenFill>
-            </a:ext>
-          </a:extLst>
         </p:spPr>
       </p:pic>
       <p:sp>
@@ -4690,7 +4741,7 @@
         </p:nvSpPr>
         <p:spPr>
           <a:xfrm>
-            <a:off x="1143000" y="5653923"/>
+            <a:off x="990599" y="270937"/>
             <a:ext cx="6858000" cy="979533"/>
           </a:xfrm>
         </p:spPr>
@@ -19478,8 +19529,8 @@
           <a:chExt cx="0" cy="0"/>
         </a:xfrm>
       </p:grpSpPr>
-      <mc:AlternateContent xmlns:mc="http://schemas.openxmlformats.org/markup-compatibility/2006">
-        <mc:Choice xmlns:a14="http://schemas.microsoft.com/office/drawing/2010/main" Requires="a14">
+      <mc:AlternateContent xmlns:mc="http://schemas.openxmlformats.org/markup-compatibility/2006" xmlns:a14="http://schemas.microsoft.com/office/drawing/2010/main">
+        <mc:Choice Requires="a14">
           <p:sp>
             <p:nvSpPr>
               <p:cNvPr id="189442" name="Rectangle 2"/>
@@ -19877,7 +19928,7 @@
             </p:txBody>
           </p:sp>
         </mc:Choice>
-        <mc:Fallback>
+        <mc:Fallback xmlns="">
           <p:sp>
             <p:nvSpPr>
               <p:cNvPr id="189442" name="Rectangle 2"/>
@@ -21775,8 +21826,8 @@
           </a:p>
         </p:txBody>
       </p:sp>
-      <mc:AlternateContent xmlns:mc="http://schemas.openxmlformats.org/markup-compatibility/2006">
-        <mc:Choice xmlns:a14="http://schemas.microsoft.com/office/drawing/2010/main" Requires="a14">
+      <mc:AlternateContent xmlns:mc="http://schemas.openxmlformats.org/markup-compatibility/2006" xmlns:a14="http://schemas.microsoft.com/office/drawing/2010/main">
+        <mc:Choice Requires="a14">
           <p:sp>
             <p:nvSpPr>
               <p:cNvPr id="45" name="TextBox 44">
@@ -21878,7 +21929,7 @@
             </p:txBody>
           </p:sp>
         </mc:Choice>
-        <mc:Fallback>
+        <mc:Fallback xmlns="">
           <p:sp>
             <p:nvSpPr>
               <p:cNvPr id="45" name="TextBox 44">
@@ -23769,8 +23820,8 @@
           </a:p>
         </p:txBody>
       </p:sp>
-      <mc:AlternateContent xmlns:mc="http://schemas.openxmlformats.org/markup-compatibility/2006">
-        <mc:Choice xmlns:a14="http://schemas.microsoft.com/office/drawing/2010/main" Requires="a14">
+      <mc:AlternateContent xmlns:mc="http://schemas.openxmlformats.org/markup-compatibility/2006" xmlns:a14="http://schemas.microsoft.com/office/drawing/2010/main">
+        <mc:Choice Requires="a14">
           <p:sp>
             <p:nvSpPr>
               <p:cNvPr id="45" name="TextBox 44">
@@ -23872,7 +23923,7 @@
             </p:txBody>
           </p:sp>
         </mc:Choice>
-        <mc:Fallback>
+        <mc:Fallback xmlns="">
           <p:sp>
             <p:nvSpPr>
               <p:cNvPr id="45" name="TextBox 44">
